--- a/dist/초2/국어/기초문해/초2_국어_기초문해_02_헷갈리는낱말바르게쓰기.pptx
+++ b/dist/초2/국어/기초문해/초2_국어_기초문해_02_헷갈리는낱말바르게쓰기.pptx
@@ -120,13 +120,13 @@
   <p:extLst>
     <p:ext uri="{521415D9-36F7-43E2-AB2F-B90AF26B5E84}">
       <p14:sectionLst xmlns:p14="http://schemas.microsoft.com/office/powerpoint/2010/main">
-        <p14:section name="도입" id="{c80e8e80-edce-de17-a892-deb7ef4e35d5}">
+        <p14:section name="도입" id="{5593e35b-c8c6-e452-e1f8-2130bab19c1c}">
           <p14:sldIdLst>
             <p14:sldId id="256"/>
             <p14:sldId id="257"/>
           </p14:sldIdLst>
         </p14:section>
-        <p14:section name="개념" id="{078e52e2-acc9-d2ec-c046-f7ebfb789642}">
+        <p14:section name="개념" id="{e81cfda4-692f-476f-54f3-b3d1bfe1fb14}">
           <p14:sldIdLst>
             <p14:sldId id="258"/>
             <p14:sldId id="259"/>
@@ -134,26 +134,26 @@
             <p14:sldId id="261"/>
           </p14:sldIdLst>
         </p14:section>
-        <p14:section name="연습" id="{20e83ad5-def2-dad5-714b-c727c758adaf}">
+        <p14:section name="연습" id="{fe054809-100d-40b2-63f4-5b564bb3456c}">
           <p14:sldIdLst>
             <p14:sldId id="262"/>
             <p14:sldId id="263"/>
             <p14:sldId id="264"/>
           </p14:sldIdLst>
         </p14:section>
-        <p14:section name="확인" id="{e66cff0b-f266-3d23-4510-62e278d87e5e}">
+        <p14:section name="확인" id="{cde70fdc-6842-4b37-408e-f9cac2e0f1b0}">
           <p14:sldIdLst>
             <p14:sldId id="265"/>
             <p14:sldId id="266"/>
             <p14:sldId id="267"/>
           </p14:sldIdLst>
         </p14:section>
-        <p14:section name="정리" id="{d01ceacc-19f5-32b3-ad8f-02169aeb52e9}">
+        <p14:section name="정리" id="{00e4362b-feaf-4867-7093-d66895fa92a6}">
           <p14:sldIdLst>
             <p14:sldId id="268"/>
           </p14:sldIdLst>
         </p14:section>
-        <p14:section name="보충" id="{8c466882-0edb-3267-faf3-64dbe2465131}">
+        <p14:section name="보충" id="{f2910ca4-d132-8e3d-fbc6-d6df803a4596}">
           <p14:sldIdLst>
             <p14:sldId id="269"/>
           </p14:sldIdLst>
@@ -570,6 +570,8 @@
 - “소리는 똑같은데 받침이 달라. 오늘은 이렇게 헷갈리는 낱말을 뜻에 맞게 쓰는 방법을 배울 거야.”
 예상 답
 - “소리가 똑같아요.” “받침이 달라요.”
+막히면
+- 두 낱말을 크게 써서 받침만 손가락으로 짚어 비교하게 합니다.
 주의
 - 낫다와 낮다는 둘 다 [낟따]로 소리 납니다(받침 ㅅ·ㅈ이 [ㄷ]으로 소리 나고 뒤의 ㄷ이 [ㄸ]이 되는 된소리되기).</a:t>
             </a:r>
@@ -866,7 +868,7 @@
 막히면
 - “문이 다칠 수 있을까? 문을 어떻게 하는 거지?”라고 묻습니다.
 주의
-- 발음(부모 참고): 닫히다는 [다치다]입니다(받침 ㄷ과 ㅎ이 만나 [ㅌ]이 되고, 뒤의 ‘이’ 때문에 [ㅊ]으로 소리 남).
+- 발음(부모 참고): 닫히다는 [다치다]입니다(받침 ㄷ과 ㅎ이 만나 [ㅌ]이 되는 거센소리되기, 다시 뒤의 ‘이’ 때문에 [ㅊ]이 되는 구개음화).
 - 답만 맞히고 까닭을 말하지 못하면 기록표에 ‘답만’으로 표시합니다.</a:t>
             </a:r>
             <a:endParaRPr lang="en-US" dirty="0"/>
@@ -963,7 +965,9 @@
 예상 답
 - “소리가 같아도 뜻이 다르면 다르게 써요.”
 정답
-- ① 나았(나았어요) ② 낮아(낮아요) ③ 맞혔(맞혔어요)</a:t>
+- ① 나았(나았어요) ② 낮아(낮아요) ③ 맞혔(맞혔어요)
+막히면
+- S04의 표와 S05의 카드를 다시 보여 줍니다.</a:t>
             </a:r>
             <a:endParaRPr lang="en-US" dirty="0"/>
           </a:p>

--- a/dist/초2/국어/기초문해/초2_국어_기초문해_02_헷갈리는낱말바르게쓰기.pptx
+++ b/dist/초2/국어/기초문해/초2_국어_기초문해_02_헷갈리는낱말바르게쓰기.pptx
@@ -120,13 +120,13 @@
   <p:extLst>
     <p:ext uri="{521415D9-36F7-43E2-AB2F-B90AF26B5E84}">
       <p14:sectionLst xmlns:p14="http://schemas.microsoft.com/office/powerpoint/2010/main">
-        <p14:section name="도입" id="{5593e35b-c8c6-e452-e1f8-2130bab19c1c}">
+        <p14:section name="도입" id="{aef0e0bc-fedb-884f-9198-e007ab198997}">
           <p14:sldIdLst>
             <p14:sldId id="256"/>
             <p14:sldId id="257"/>
           </p14:sldIdLst>
         </p14:section>
-        <p14:section name="개념" id="{e81cfda4-692f-476f-54f3-b3d1bfe1fb14}">
+        <p14:section name="개념" id="{876b2fda-35ea-a979-e51d-9190d1c1fbfd}">
           <p14:sldIdLst>
             <p14:sldId id="258"/>
             <p14:sldId id="259"/>
@@ -134,26 +134,26 @@
             <p14:sldId id="261"/>
           </p14:sldIdLst>
         </p14:section>
-        <p14:section name="연습" id="{fe054809-100d-40b2-63f4-5b564bb3456c}">
+        <p14:section name="연습" id="{f4469ae7-b024-c291-8f75-1c50c185c0bd}">
           <p14:sldIdLst>
             <p14:sldId id="262"/>
             <p14:sldId id="263"/>
             <p14:sldId id="264"/>
           </p14:sldIdLst>
         </p14:section>
-        <p14:section name="확인" id="{cde70fdc-6842-4b37-408e-f9cac2e0f1b0}">
+        <p14:section name="확인" id="{c3e866e5-78ee-b3c1-fae4-ed12bd9542cf}">
           <p14:sldIdLst>
             <p14:sldId id="265"/>
             <p14:sldId id="266"/>
             <p14:sldId id="267"/>
           </p14:sldIdLst>
         </p14:section>
-        <p14:section name="정리" id="{00e4362b-feaf-4867-7093-d66895fa92a6}">
+        <p14:section name="정리" id="{7665a27e-b5ba-f97b-bd34-cdb91a7d62cb}">
           <p14:sldIdLst>
             <p14:sldId id="268"/>
           </p14:sldIdLst>
         </p14:section>
-        <p14:section name="보충" id="{f2910ca4-d132-8e3d-fbc6-d6df803a4596}">
+        <p14:section name="보충" id="{309bcb8e-5911-38e3-20dc-ca749629578f}">
           <p14:sldIdLst>
             <p14:sldId id="269"/>
           </p14:sldIdLst>
@@ -6791,7 +6791,7 @@
           </p:nvPr>
         </p:nvGraphicFramePr>
         <p:xfrm>
-          <a:off x="1522476" y="1696720"/>
+          <a:off x="1522476" y="1737360"/>
           <a:ext cx="9144000" cy="914400"/>
         </p:xfrm>
         <a:graphic>
@@ -6802,7 +6802,7 @@
                 <a:gridCol w="2743200"/>
                 <a:gridCol w="6400800"/>
               </a:tblGrid>
-              <a:tr h="650240">
+              <a:tr h="629920">
                 <a:tc>
                   <a:txBody>
                     <a:bodyPr/>
@@ -6940,7 +6940,7 @@
                   </a:tcPr>
                 </a:tc>
               </a:tr>
-              <a:tr h="650240">
+              <a:tr h="629920">
                 <a:tc>
                   <a:txBody>
                     <a:bodyPr/>
@@ -7078,7 +7078,7 @@
                   </a:tcPr>
                 </a:tc>
               </a:tr>
-              <a:tr h="650240">
+              <a:tr h="629920">
                 <a:tc>
                   <a:txBody>
                     <a:bodyPr/>
@@ -7216,7 +7216,7 @@
                   </a:tcPr>
                 </a:tc>
               </a:tr>
-              <a:tr h="650240">
+              <a:tr h="629920">
                 <a:tc>
                   <a:txBody>
                     <a:bodyPr/>
